--- a/accounting.pptx
+++ b/accounting.pptx
@@ -5070,7 +5070,7 @@
         <p:spPr>
           <a:xfrm>
             <a:off x="4582886" y="1774371"/>
-            <a:ext cx="1143000" cy="523220"/>
+            <a:ext cx="1143000" cy="738664"/>
           </a:xfrm>
           <a:prstGeom prst="rect">
             <a:avLst/>
@@ -5106,6 +5106,13 @@
               <a:t>Account 1</a:t>
             </a:r>
           </a:p>
+          <a:p>
+            <a:pPr algn="ctr"/>
+            <a:r>
+              <a:rPr lang="en-US" sz="1400" dirty="0"/>
+              <a:t>(giver)</a:t>
+            </a:r>
+          </a:p>
         </p:txBody>
       </p:sp>
       <p:sp>
@@ -5123,7 +5130,7 @@
         <p:spPr>
           <a:xfrm>
             <a:off x="6677786" y="1774371"/>
-            <a:ext cx="1143000" cy="523220"/>
+            <a:ext cx="1143000" cy="738664"/>
           </a:xfrm>
           <a:prstGeom prst="rect">
             <a:avLst/>
@@ -5156,7 +5163,14 @@
             </a:br>
             <a:r>
               <a:rPr lang="en-US" sz="1400" dirty="0"/>
-              <a:t>Account 1</a:t>
+              <a:t>Account 2</a:t>
+            </a:r>
+          </a:p>
+          <a:p>
+            <a:pPr algn="ctr"/>
+            <a:r>
+              <a:rPr lang="en-US" sz="1400" dirty="0"/>
+              <a:t>(receiver)</a:t>
             </a:r>
           </a:p>
         </p:txBody>
@@ -5179,7 +5193,7 @@
         </p:nvCxnSpPr>
         <p:spPr>
           <a:xfrm>
-            <a:off x="5725886" y="2035981"/>
+            <a:off x="5725886" y="2143703"/>
             <a:ext cx="951900" cy="0"/>
           </a:xfrm>
           <a:prstGeom prst="straightConnector1">
@@ -5283,8 +5297,8 @@
         </p:nvSpPr>
         <p:spPr>
           <a:xfrm>
-            <a:off x="6096000" y="129380"/>
-            <a:ext cx="6013899" cy="1384995"/>
+            <a:off x="6096000" y="85836"/>
+            <a:ext cx="6013899" cy="2739211"/>
           </a:xfrm>
           <a:prstGeom prst="rect">
             <a:avLst/>
@@ -5308,17 +5322,13 @@
           <a:lstStyle/>
           <a:p>
             <a:r>
-              <a:rPr lang="en-US" sz="1400" dirty="0"/>
-              <a:t>Transactions are entered in the books of accounts </a:t>
-            </a:r>
-          </a:p>
-          <a:p>
-            <a:r>
-              <a:rPr lang="en-US" sz="1400" dirty="0"/>
-              <a:t>by applying the following golden rules of accounting:</a:t>
-            </a:r>
-          </a:p>
-          <a:p>
+              <a:rPr lang="en-US" b="1" dirty="0">
+                <a:solidFill>
+                  <a:srgbClr val="00B050"/>
+                </a:solidFill>
+              </a:rPr>
+              <a:t>Golden rules of accounting:</a:t>
+            </a:r>
             <a:endParaRPr lang="en-US" sz="1400" dirty="0"/>
           </a:p>
           <a:p>
@@ -5332,12 +5342,24 @@
                   <a:srgbClr val="FF0000"/>
                 </a:solidFill>
               </a:rPr>
-              <a:t>Real account</a:t>
+              <a:t>Personal account</a:t>
             </a:r>
             <a:r>
               <a:rPr lang="en-US" sz="1400" dirty="0"/>
-              <a:t>: Debit what comes in and credit what goes out.</a:t>
-            </a:r>
+              <a:t>: </a:t>
+            </a:r>
+            <a:br>
+              <a:rPr lang="en-US" sz="1400" dirty="0"/>
+            </a:br>
+            <a:r>
+              <a:rPr lang="en-US" sz="1400" dirty="0">
+                <a:solidFill>
+                  <a:srgbClr val="00B0F0"/>
+                </a:solidFill>
+              </a:rPr>
+              <a:t>Debit the receiver (person) and credit the giver</a:t>
+            </a:r>
+            <a:endParaRPr lang="en-US" sz="1400" dirty="0"/>
           </a:p>
           <a:p>
             <a:pPr marL="285750" indent="-285750">
@@ -5350,12 +5372,68 @@
                   <a:srgbClr val="FF0000"/>
                 </a:solidFill>
               </a:rPr>
-              <a:t>Personal account</a:t>
-            </a:r>
+              <a:t>Real account </a:t>
+            </a:r>
+            <a:br>
+              <a:rPr lang="en-US" sz="1400" b="1" dirty="0">
+                <a:solidFill>
+                  <a:srgbClr val="FF0000"/>
+                </a:solidFill>
+              </a:rPr>
+            </a:br>
             <a:r>
               <a:rPr lang="en-US" sz="1400" dirty="0"/>
-              <a:t>: Debit the receiver and credit the giver.</a:t>
-            </a:r>
+              <a:t>.. tangible – can touch: building, inventory, cash, ...</a:t>
+            </a:r>
+            <a:br>
+              <a:rPr lang="en-US" sz="1400" dirty="0"/>
+            </a:br>
+            <a:r>
+              <a:rPr lang="en-US" sz="1400" dirty="0"/>
+              <a:t>.. </a:t>
+            </a:r>
+            <a:r>
+              <a:rPr lang="en-US" sz="1400" dirty="0" err="1"/>
+              <a:t>intagible</a:t>
+            </a:r>
+            <a:r>
+              <a:rPr lang="en-US" sz="1400" dirty="0"/>
+              <a:t> - </a:t>
+            </a:r>
+            <a:r>
+              <a:rPr lang="en-US" sz="1400" i="0" dirty="0">
+                <a:effectLst/>
+              </a:rPr>
+              <a:t>Goodwill, Patent, Copyright, Trademark</a:t>
+            </a:r>
+            <a:br>
+              <a:rPr lang="en-US" sz="1400" i="0" dirty="0">
+                <a:effectLst/>
+              </a:rPr>
+            </a:br>
+            <a:r>
+              <a:rPr lang="en-US" sz="1400" dirty="0">
+                <a:solidFill>
+                  <a:srgbClr val="00B0F0"/>
+                </a:solidFill>
+              </a:rPr>
+              <a:t>Debit what comes in and credit what goes out. Example: </a:t>
+            </a:r>
+            <a:r>
+              <a:rPr lang="en-US" sz="1400" i="0" dirty="0">
+                <a:solidFill>
+                  <a:srgbClr val="00B0F0"/>
+                </a:solidFill>
+                <a:effectLst/>
+                <a:latin typeface="Minion Pro"/>
+              </a:rPr>
+              <a:t>Furniture purchased by cash. Debit furniture acct, and credit cash acct.</a:t>
+            </a:r>
+            <a:endParaRPr lang="en-US" sz="1400" dirty="0">
+              <a:solidFill>
+                <a:srgbClr val="00B0F0"/>
+              </a:solidFill>
+            </a:endParaRPr>
           </a:p>
           <a:p>
             <a:pPr marL="285750" indent="-285750">
@@ -5372,7 +5450,28 @@
             </a:r>
             <a:r>
               <a:rPr lang="en-US" sz="1400" dirty="0"/>
-              <a:t>: Debit all expenses &amp; losses and credit all incomes &amp; gains</a:t>
+              <a:t>: </a:t>
+            </a:r>
+          </a:p>
+          <a:p>
+            <a:pPr marL="285750" indent="-285750">
+              <a:buFont typeface="Arial" panose="020B0604020202020204" pitchFamily="34" charset="0"/>
+              <a:buChar char="•"/>
+            </a:pPr>
+            <a:r>
+              <a:rPr lang="en-US" sz="1400" dirty="0"/>
+              <a:t>(income or gains, expenses or losses – for example: – Rent, commission received, salary, wages, conveyance, etc.</a:t>
+            </a:r>
+            <a:br>
+              <a:rPr lang="en-US" sz="1400" dirty="0"/>
+            </a:br>
+            <a:r>
+              <a:rPr lang="en-US" sz="1400" dirty="0">
+                <a:solidFill>
+                  <a:srgbClr val="00B0F0"/>
+                </a:solidFill>
+              </a:rPr>
+              <a:t>Debit all expenses &amp; losses and credit all incomes &amp; gains</a:t>
             </a:r>
           </a:p>
         </p:txBody>
@@ -5392,13 +5491,13 @@
           <p:nvPr>
             <p:extLst>
               <p:ext uri="{D42A27DB-BD31-4B8C-83A1-F6EECF244321}">
-                <p14:modId xmlns:p14="http://schemas.microsoft.com/office/powerpoint/2010/main" val="1470707999"/>
+                <p14:modId xmlns:p14="http://schemas.microsoft.com/office/powerpoint/2010/main" val="2255649349"/>
               </p:ext>
             </p:extLst>
           </p:nvPr>
         </p:nvGraphicFramePr>
         <p:xfrm>
-          <a:off x="6109395" y="2075815"/>
+          <a:off x="6109395" y="3622837"/>
           <a:ext cx="2379891" cy="1391285"/>
         </p:xfrm>
         <a:graphic>
@@ -6876,7 +6975,7 @@
         </p:nvSpPr>
         <p:spPr>
           <a:xfrm>
-            <a:off x="6096000" y="1647221"/>
+            <a:off x="6096000" y="3248673"/>
             <a:ext cx="3685426" cy="307777"/>
           </a:xfrm>
           <a:prstGeom prst="rect">
@@ -7250,7 +7349,7 @@
           </p:cNvPicPr>
           <p:nvPr/>
         </p:nvPicPr>
-        <p:blipFill>
+        <p:blipFill rotWithShape="1">
           <a:blip r:embed="rId3" cstate="email">
             <a:extLst>
               <a:ext uri="{28A0092B-C50C-407E-A947-70E740481C1C}">
@@ -7259,14 +7358,12 @@
             </a:extLst>
           </a:blip>
           <a:srcRect/>
-          <a:stretch>
-            <a:fillRect/>
-          </a:stretch>
+          <a:stretch/>
         </p:blipFill>
         <p:spPr bwMode="auto">
           <a:xfrm>
-            <a:off x="8578186" y="2075815"/>
-            <a:ext cx="3519279" cy="3787162"/>
+            <a:off x="8578186" y="3622837"/>
+            <a:ext cx="3519279" cy="3105783"/>
           </a:xfrm>
           <a:prstGeom prst="rect">
             <a:avLst/>

--- a/accounting.pptx
+++ b/accounting.pptx
@@ -687,7 +687,7 @@
           <a:p>
             <a:fld id="{EB1FAE4C-5332-014D-8E1B-BB8DA73EF81D}" type="datetimeFigureOut">
               <a:rPr lang="en-US"/>
-              <a:t>12/10/22</a:t>
+              <a:t>12/12/22</a:t>
             </a:fld>
             <a:endParaRPr lang="en-US"/>
           </a:p>
@@ -857,7 +857,7 @@
           <a:p>
             <a:fld id="{EB1FAE4C-5332-014D-8E1B-BB8DA73EF81D}" type="datetimeFigureOut">
               <a:rPr lang="en-US"/>
-              <a:t>12/10/22</a:t>
+              <a:t>12/12/22</a:t>
             </a:fld>
             <a:endParaRPr lang="en-US"/>
           </a:p>
@@ -1037,7 +1037,7 @@
           <a:p>
             <a:fld id="{EB1FAE4C-5332-014D-8E1B-BB8DA73EF81D}" type="datetimeFigureOut">
               <a:rPr lang="en-US"/>
-              <a:t>12/10/22</a:t>
+              <a:t>12/12/22</a:t>
             </a:fld>
             <a:endParaRPr lang="en-US"/>
           </a:p>
@@ -1207,7 +1207,7 @@
           <a:p>
             <a:fld id="{EB1FAE4C-5332-014D-8E1B-BB8DA73EF81D}" type="datetimeFigureOut">
               <a:rPr lang="en-US"/>
-              <a:t>12/10/22</a:t>
+              <a:t>12/12/22</a:t>
             </a:fld>
             <a:endParaRPr lang="en-US"/>
           </a:p>
@@ -1454,7 +1454,7 @@
           <a:p>
             <a:fld id="{EB1FAE4C-5332-014D-8E1B-BB8DA73EF81D}" type="datetimeFigureOut">
               <a:rPr lang="en-US"/>
-              <a:t>12/10/22</a:t>
+              <a:t>12/12/22</a:t>
             </a:fld>
             <a:endParaRPr lang="en-US"/>
           </a:p>
@@ -1685,7 +1685,7 @@
           <a:p>
             <a:fld id="{EB1FAE4C-5332-014D-8E1B-BB8DA73EF81D}" type="datetimeFigureOut">
               <a:rPr lang="en-US"/>
-              <a:t>12/10/22</a:t>
+              <a:t>12/12/22</a:t>
             </a:fld>
             <a:endParaRPr lang="en-US"/>
           </a:p>
@@ -2051,7 +2051,7 @@
           <a:p>
             <a:fld id="{EB1FAE4C-5332-014D-8E1B-BB8DA73EF81D}" type="datetimeFigureOut">
               <a:rPr lang="en-US"/>
-              <a:t>12/10/22</a:t>
+              <a:t>12/12/22</a:t>
             </a:fld>
             <a:endParaRPr lang="en-US"/>
           </a:p>
@@ -2170,7 +2170,7 @@
           <a:p>
             <a:fld id="{EB1FAE4C-5332-014D-8E1B-BB8DA73EF81D}" type="datetimeFigureOut">
               <a:rPr lang="en-US"/>
-              <a:t>12/10/22</a:t>
+              <a:t>12/12/22</a:t>
             </a:fld>
             <a:endParaRPr lang="en-US"/>
           </a:p>
@@ -2267,7 +2267,7 @@
           <a:p>
             <a:fld id="{EB1FAE4C-5332-014D-8E1B-BB8DA73EF81D}" type="datetimeFigureOut">
               <a:rPr lang="en-US"/>
-              <a:t>12/10/22</a:t>
+              <a:t>12/12/22</a:t>
             </a:fld>
             <a:endParaRPr lang="en-US"/>
           </a:p>
@@ -2543,7 +2543,7 @@
           <a:p>
             <a:fld id="{EB1FAE4C-5332-014D-8E1B-BB8DA73EF81D}" type="datetimeFigureOut">
               <a:rPr lang="en-US"/>
-              <a:t>12/10/22</a:t>
+              <a:t>12/12/22</a:t>
             </a:fld>
             <a:endParaRPr lang="en-US"/>
           </a:p>
@@ -2800,7 +2800,7 @@
           <a:p>
             <a:fld id="{EB1FAE4C-5332-014D-8E1B-BB8DA73EF81D}" type="datetimeFigureOut">
               <a:rPr lang="en-US"/>
-              <a:t>12/10/22</a:t>
+              <a:t>12/12/22</a:t>
             </a:fld>
             <a:endParaRPr lang="en-US"/>
           </a:p>
@@ -3013,7 +3013,7 @@
           <a:p>
             <a:fld id="{EB1FAE4C-5332-014D-8E1B-BB8DA73EF81D}" type="datetimeFigureOut">
               <a:rPr lang="en-US"/>
-              <a:t>12/10/22</a:t>
+              <a:t>12/12/22</a:t>
             </a:fld>
             <a:endParaRPr lang="en-US"/>
           </a:p>
@@ -4028,8 +4028,8 @@
         </p:nvSpPr>
         <p:spPr>
           <a:xfrm>
-            <a:off x="6315635" y="612533"/>
-            <a:ext cx="5755652" cy="4616648"/>
+            <a:off x="6008914" y="612533"/>
+            <a:ext cx="6062373" cy="5693866"/>
           </a:xfrm>
           <a:prstGeom prst="rect">
             <a:avLst/>
@@ -4470,16 +4470,68 @@
             </a:r>
           </a:p>
           <a:p>
-            <a:pPr marL="285750" indent="-285750">
-              <a:buFont typeface="Arial" panose="020B0604020202020204" pitchFamily="34" charset="0"/>
-              <a:buChar char="•"/>
-            </a:pPr>
             <a:endParaRPr lang="en-US" sz="1400" dirty="0">
               <a:solidFill>
                 <a:srgbClr val="202122"/>
               </a:solidFill>
               <a:latin typeface="Arial" panose="020B0604020202020204" pitchFamily="34" charset="0"/>
             </a:endParaRPr>
+          </a:p>
+          <a:p>
+            <a:r>
+              <a:rPr lang="en-US" sz="1400" dirty="0">
+                <a:solidFill>
+                  <a:srgbClr val="202122"/>
+                </a:solidFill>
+                <a:latin typeface="Arial" panose="020B0604020202020204" pitchFamily="34" charset="0"/>
+              </a:rPr>
+              <a:t>Other areas of "accounting"</a:t>
+            </a:r>
+          </a:p>
+          <a:p>
+            <a:pPr marL="285750" indent="-285750">
+              <a:buFont typeface="Arial" panose="020B0604020202020204" pitchFamily="34" charset="0"/>
+              <a:buChar char="•"/>
+            </a:pPr>
+            <a:r>
+              <a:rPr lang="en-US" sz="1400" dirty="0">
+                <a:solidFill>
+                  <a:srgbClr val="202122"/>
+                </a:solidFill>
+                <a:latin typeface="Arial" panose="020B0604020202020204" pitchFamily="34" charset="0"/>
+              </a:rPr>
+              <a:t>Compliance - Environmental, Social, and Governance (ESG)</a:t>
+            </a:r>
+          </a:p>
+          <a:p>
+            <a:pPr marL="285750" indent="-285750">
+              <a:buFont typeface="Arial" panose="020B0604020202020204" pitchFamily="34" charset="0"/>
+              <a:buChar char="•"/>
+            </a:pPr>
+            <a:r>
+              <a:rPr lang="en-US" sz="1400" dirty="0">
+                <a:solidFill>
+                  <a:srgbClr val="202122"/>
+                </a:solidFill>
+                <a:latin typeface="Arial" panose="020B0604020202020204" pitchFamily="34" charset="0"/>
+              </a:rPr>
+              <a:t>Impact Measurements of companies/non4profits</a:t>
+            </a:r>
+          </a:p>
+          <a:p>
+            <a:pPr marL="285750" indent="-285750">
+              <a:buFont typeface="Arial" panose="020B0604020202020204" pitchFamily="34" charset="0"/>
+              <a:buChar char="•"/>
+            </a:pPr>
+            <a:r>
+              <a:rPr lang="en-US" sz="1400" dirty="0">
+                <a:solidFill>
+                  <a:srgbClr val="202122"/>
+                </a:solidFill>
+                <a:latin typeface="Arial" panose="020B0604020202020204" pitchFamily="34" charset="0"/>
+              </a:rPr>
+              <a:t>Managing grants on smart contracts (in crypto)</a:t>
+            </a:r>
           </a:p>
         </p:txBody>
       </p:sp>

--- a/accounting.pptx
+++ b/accounting.pptx
@@ -5,12 +5,13 @@
     <p:sldMasterId id="2147483834" r:id="rId1"/>
   </p:sldMasterIdLst>
   <p:notesMasterIdLst>
-    <p:notesMasterId r:id="rId5"/>
+    <p:notesMasterId r:id="rId6"/>
   </p:notesMasterIdLst>
   <p:sldIdLst>
     <p:sldId id="296" r:id="rId2"/>
     <p:sldId id="297" r:id="rId3"/>
     <p:sldId id="298" r:id="rId4"/>
+    <p:sldId id="299" r:id="rId5"/>
   </p:sldIdLst>
   <p:sldSz cx="12192000" cy="6858000"/>
   <p:notesSz cx="6858000" cy="9144000"/>
@@ -687,7 +688,7 @@
           <a:p>
             <a:fld id="{EB1FAE4C-5332-014D-8E1B-BB8DA73EF81D}" type="datetimeFigureOut">
               <a:rPr lang="en-US"/>
-              <a:t>12/12/22</a:t>
+              <a:t>12/25/22</a:t>
             </a:fld>
             <a:endParaRPr lang="en-US"/>
           </a:p>
@@ -857,7 +858,7 @@
           <a:p>
             <a:fld id="{EB1FAE4C-5332-014D-8E1B-BB8DA73EF81D}" type="datetimeFigureOut">
               <a:rPr lang="en-US"/>
-              <a:t>12/12/22</a:t>
+              <a:t>12/25/22</a:t>
             </a:fld>
             <a:endParaRPr lang="en-US"/>
           </a:p>
@@ -1037,7 +1038,7 @@
           <a:p>
             <a:fld id="{EB1FAE4C-5332-014D-8E1B-BB8DA73EF81D}" type="datetimeFigureOut">
               <a:rPr lang="en-US"/>
-              <a:t>12/12/22</a:t>
+              <a:t>12/25/22</a:t>
             </a:fld>
             <a:endParaRPr lang="en-US"/>
           </a:p>
@@ -1207,7 +1208,7 @@
           <a:p>
             <a:fld id="{EB1FAE4C-5332-014D-8E1B-BB8DA73EF81D}" type="datetimeFigureOut">
               <a:rPr lang="en-US"/>
-              <a:t>12/12/22</a:t>
+              <a:t>12/25/22</a:t>
             </a:fld>
             <a:endParaRPr lang="en-US"/>
           </a:p>
@@ -1454,7 +1455,7 @@
           <a:p>
             <a:fld id="{EB1FAE4C-5332-014D-8E1B-BB8DA73EF81D}" type="datetimeFigureOut">
               <a:rPr lang="en-US"/>
-              <a:t>12/12/22</a:t>
+              <a:t>12/25/22</a:t>
             </a:fld>
             <a:endParaRPr lang="en-US"/>
           </a:p>
@@ -1685,7 +1686,7 @@
           <a:p>
             <a:fld id="{EB1FAE4C-5332-014D-8E1B-BB8DA73EF81D}" type="datetimeFigureOut">
               <a:rPr lang="en-US"/>
-              <a:t>12/12/22</a:t>
+              <a:t>12/25/22</a:t>
             </a:fld>
             <a:endParaRPr lang="en-US"/>
           </a:p>
@@ -2051,7 +2052,7 @@
           <a:p>
             <a:fld id="{EB1FAE4C-5332-014D-8E1B-BB8DA73EF81D}" type="datetimeFigureOut">
               <a:rPr lang="en-US"/>
-              <a:t>12/12/22</a:t>
+              <a:t>12/25/22</a:t>
             </a:fld>
             <a:endParaRPr lang="en-US"/>
           </a:p>
@@ -2170,7 +2171,7 @@
           <a:p>
             <a:fld id="{EB1FAE4C-5332-014D-8E1B-BB8DA73EF81D}" type="datetimeFigureOut">
               <a:rPr lang="en-US"/>
-              <a:t>12/12/22</a:t>
+              <a:t>12/25/22</a:t>
             </a:fld>
             <a:endParaRPr lang="en-US"/>
           </a:p>
@@ -2267,7 +2268,7 @@
           <a:p>
             <a:fld id="{EB1FAE4C-5332-014D-8E1B-BB8DA73EF81D}" type="datetimeFigureOut">
               <a:rPr lang="en-US"/>
-              <a:t>12/12/22</a:t>
+              <a:t>12/25/22</a:t>
             </a:fld>
             <a:endParaRPr lang="en-US"/>
           </a:p>
@@ -2543,7 +2544,7 @@
           <a:p>
             <a:fld id="{EB1FAE4C-5332-014D-8E1B-BB8DA73EF81D}" type="datetimeFigureOut">
               <a:rPr lang="en-US"/>
-              <a:t>12/12/22</a:t>
+              <a:t>12/25/22</a:t>
             </a:fld>
             <a:endParaRPr lang="en-US"/>
           </a:p>
@@ -2800,7 +2801,7 @@
           <a:p>
             <a:fld id="{EB1FAE4C-5332-014D-8E1B-BB8DA73EF81D}" type="datetimeFigureOut">
               <a:rPr lang="en-US"/>
-              <a:t>12/12/22</a:t>
+              <a:t>12/25/22</a:t>
             </a:fld>
             <a:endParaRPr lang="en-US"/>
           </a:p>
@@ -3013,7 +3014,7 @@
           <a:p>
             <a:fld id="{EB1FAE4C-5332-014D-8E1B-BB8DA73EF81D}" type="datetimeFigureOut">
               <a:rPr lang="en-US"/>
-              <a:t>12/12/22</a:t>
+              <a:t>12/25/22</a:t>
             </a:fld>
             <a:endParaRPr lang="en-US"/>
           </a:p>
@@ -3589,7 +3590,7 @@
                 <a:effectLst/>
                 <a:latin typeface="Arial" panose="020B0604020202020204" pitchFamily="34" charset="0"/>
               </a:rPr>
-              <a:t> = Generally Accepted Accounting Principles</a:t>
+              <a:t> = Generally Accepted Accounting Principles / Standards</a:t>
             </a:r>
             <a:br>
               <a:rPr lang="en-US" sz="1400" b="0" i="0" dirty="0">
@@ -3609,40 +3610,7 @@
                 <a:latin typeface="Arial" panose="020B0604020202020204" pitchFamily="34" charset="0"/>
                 <a:hlinkClick r:id="rId3"/>
               </a:rPr>
-              <a:t>https://</a:t>
-            </a:r>
-            <a:r>
-              <a:rPr lang="en-US" sz="1400" b="0" i="0" dirty="0" err="1">
-                <a:solidFill>
-                  <a:srgbClr val="202122"/>
-                </a:solidFill>
-                <a:effectLst/>
-                <a:latin typeface="Arial" panose="020B0604020202020204" pitchFamily="34" charset="0"/>
-                <a:hlinkClick r:id="rId3"/>
-              </a:rPr>
-              <a:t>en.wikipedia.org</a:t>
-            </a:r>
-            <a:r>
-              <a:rPr lang="en-US" sz="1400" b="0" i="0" dirty="0">
-                <a:solidFill>
-                  <a:srgbClr val="202122"/>
-                </a:solidFill>
-                <a:effectLst/>
-                <a:latin typeface="Arial" panose="020B0604020202020204" pitchFamily="34" charset="0"/>
-                <a:hlinkClick r:id="rId3"/>
-              </a:rPr>
-              <a:t>/wiki/</a:t>
-            </a:r>
-            <a:r>
-              <a:rPr lang="en-US" sz="1400" b="0" i="0" dirty="0" err="1">
-                <a:solidFill>
-                  <a:srgbClr val="202122"/>
-                </a:solidFill>
-                <a:effectLst/>
-                <a:latin typeface="Arial" panose="020B0604020202020204" pitchFamily="34" charset="0"/>
-                <a:hlinkClick r:id="rId3"/>
-              </a:rPr>
-              <a:t>Accounting_standard</a:t>
+              <a:t>https://en.wikipedia.org/wiki/Accounting_standard</a:t>
             </a:r>
             <a:endParaRPr lang="en-US" sz="1400" b="0" i="0" dirty="0">
               <a:solidFill>
@@ -3811,7 +3779,7 @@
                 </a:solidFill>
                 <a:latin typeface="Arial" panose="020B0604020202020204" pitchFamily="34" charset="0"/>
               </a:rPr>
-              <a:t>IASB</a:t>
+              <a:t>IAS, IASB</a:t>
             </a:r>
             <a:r>
               <a:rPr lang="en-US" sz="1400" dirty="0">
@@ -3838,37 +3806,7 @@
                 <a:latin typeface="Arial" panose="020B0604020202020204" pitchFamily="34" charset="0"/>
                 <a:hlinkClick r:id="rId6"/>
               </a:rPr>
-              <a:t>https://</a:t>
-            </a:r>
-            <a:r>
-              <a:rPr lang="en-US" sz="1400" dirty="0" err="1">
-                <a:solidFill>
-                  <a:srgbClr val="202122"/>
-                </a:solidFill>
-                <a:latin typeface="Arial" panose="020B0604020202020204" pitchFamily="34" charset="0"/>
-                <a:hlinkClick r:id="rId6"/>
-              </a:rPr>
-              <a:t>en.wikipedia.org</a:t>
-            </a:r>
-            <a:r>
-              <a:rPr lang="en-US" sz="1400" dirty="0">
-                <a:solidFill>
-                  <a:srgbClr val="202122"/>
-                </a:solidFill>
-                <a:latin typeface="Arial" panose="020B0604020202020204" pitchFamily="34" charset="0"/>
-                <a:hlinkClick r:id="rId6"/>
-              </a:rPr>
-              <a:t>/wiki/</a:t>
-            </a:r>
-            <a:r>
-              <a:rPr lang="en-US" sz="1400" dirty="0" err="1">
-                <a:solidFill>
-                  <a:srgbClr val="202122"/>
-                </a:solidFill>
-                <a:latin typeface="Arial" panose="020B0604020202020204" pitchFamily="34" charset="0"/>
-                <a:hlinkClick r:id="rId6"/>
-              </a:rPr>
-              <a:t>International_Accounting_Standards_Board</a:t>
+              <a:t>https://en.wikipedia.org/wiki/International_Accounting_Standards_Board</a:t>
             </a:r>
             <a:endParaRPr lang="en-US" sz="1400" dirty="0">
               <a:solidFill>
@@ -4688,7 +4626,7 @@
         </p:blipFill>
         <p:spPr>
           <a:xfrm>
-            <a:off x="5260274" y="4235187"/>
+            <a:off x="5075589" y="4370346"/>
             <a:ext cx="2104985" cy="859536"/>
           </a:xfrm>
           <a:prstGeom prst="rect">
@@ -4710,8 +4648,8 @@
         </p:nvSpPr>
         <p:spPr>
           <a:xfrm>
-            <a:off x="4899247" y="2559201"/>
-            <a:ext cx="3108040" cy="1384995"/>
+            <a:off x="4503249" y="2988399"/>
+            <a:ext cx="3217808" cy="1384995"/>
           </a:xfrm>
           <a:prstGeom prst="rect">
             <a:avLst/>
@@ -5003,13 +4941,23 @@
         </p:nvSpPr>
         <p:spPr>
           <a:xfrm>
-            <a:off x="8601234" y="1720510"/>
-            <a:ext cx="3217809" cy="1677382"/>
+            <a:off x="7956747" y="4930625"/>
+            <a:ext cx="4114539" cy="1246495"/>
           </a:xfrm>
           <a:prstGeom prst="rect">
             <a:avLst/>
           </a:prstGeom>
-          <a:noFill/>
+          <a:solidFill>
+            <a:schemeClr val="accent4">
+              <a:lumMod val="20000"/>
+              <a:lumOff val="80000"/>
+            </a:schemeClr>
+          </a:solidFill>
+          <a:ln>
+            <a:solidFill>
+              <a:srgbClr val="FF0000"/>
+            </a:solidFill>
+          </a:ln>
         </p:spPr>
         <p:txBody>
           <a:bodyPr wrap="square" rtlCol="0">
@@ -5121,7 +5069,7 @@
         </p:nvSpPr>
         <p:spPr>
           <a:xfrm>
-            <a:off x="4582886" y="1774371"/>
+            <a:off x="4509132" y="2213594"/>
             <a:ext cx="1143000" cy="738664"/>
           </a:xfrm>
           <a:prstGeom prst="rect">
@@ -5181,7 +5129,7 @@
         </p:nvSpPr>
         <p:spPr>
           <a:xfrm>
-            <a:off x="6677786" y="1774371"/>
+            <a:off x="6604032" y="2213594"/>
             <a:ext cx="1143000" cy="738664"/>
           </a:xfrm>
           <a:prstGeom prst="rect">
@@ -5245,7 +5193,7 @@
         </p:nvCxnSpPr>
         <p:spPr>
           <a:xfrm>
-            <a:off x="5725886" y="2143703"/>
+            <a:off x="5652132" y="2582926"/>
             <a:ext cx="951900" cy="0"/>
           </a:xfrm>
           <a:prstGeom prst="straightConnector1">
@@ -5270,6 +5218,144 @@
           </a:fontRef>
         </p:style>
       </p:cxnSp>
+      <p:sp>
+        <p:nvSpPr>
+          <p:cNvPr id="10" name="TextBox 9">
+            <a:extLst>
+              <a:ext uri="{FF2B5EF4-FFF2-40B4-BE49-F238E27FC236}">
+                <a16:creationId xmlns:a16="http://schemas.microsoft.com/office/drawing/2014/main" id="{7EA2C841-36C0-5216-61A1-21918E200F7C}"/>
+              </a:ext>
+            </a:extLst>
+          </p:cNvPr>
+          <p:cNvSpPr txBox="1"/>
+          <p:nvPr/>
+        </p:nvSpPr>
+        <p:spPr>
+          <a:xfrm>
+            <a:off x="7956747" y="120713"/>
+            <a:ext cx="4114540" cy="2092881"/>
+          </a:xfrm>
+          <a:prstGeom prst="rect">
+            <a:avLst/>
+          </a:prstGeom>
+          <a:solidFill>
+            <a:schemeClr val="accent4">
+              <a:lumMod val="20000"/>
+              <a:lumOff val="80000"/>
+            </a:schemeClr>
+          </a:solidFill>
+          <a:ln>
+            <a:solidFill>
+              <a:srgbClr val="FF0000"/>
+            </a:solidFill>
+          </a:ln>
+        </p:spPr>
+        <p:txBody>
+          <a:bodyPr wrap="square" rtlCol="0">
+            <a:spAutoFit/>
+          </a:bodyPr>
+          <a:lstStyle/>
+          <a:p>
+            <a:r>
+              <a:rPr lang="en-US" b="1" dirty="0">
+                <a:solidFill>
+                  <a:srgbClr val="00B050"/>
+                </a:solidFill>
+              </a:rPr>
+              <a:t>Terminology:</a:t>
+            </a:r>
+          </a:p>
+          <a:p>
+            <a:pPr marL="285750" indent="-285750">
+              <a:buFont typeface="Arial" panose="020B0604020202020204" pitchFamily="34" charset="0"/>
+              <a:buChar char="•"/>
+            </a:pPr>
+            <a:r>
+              <a:rPr lang="en-US" sz="1400" b="1" dirty="0">
+                <a:solidFill>
+                  <a:srgbClr val="FF0000"/>
+                </a:solidFill>
+              </a:rPr>
+              <a:t>ledger</a:t>
+            </a:r>
+            <a:r>
+              <a:rPr lang="en-US" sz="1400" dirty="0"/>
+              <a:t> = book(s) of accounts in which account transactions are recorded</a:t>
+            </a:r>
+          </a:p>
+          <a:p>
+            <a:pPr marL="285750" indent="-285750">
+              <a:buFont typeface="Arial" panose="020B0604020202020204" pitchFamily="34" charset="0"/>
+              <a:buChar char="•"/>
+            </a:pPr>
+            <a:r>
+              <a:rPr lang="en-US" sz="1400" b="1" dirty="0">
+                <a:solidFill>
+                  <a:srgbClr val="FF0000"/>
+                </a:solidFill>
+              </a:rPr>
+              <a:t>balance sheet</a:t>
+            </a:r>
+            <a:r>
+              <a:rPr lang="en-US" sz="1400" dirty="0"/>
+              <a:t> = </a:t>
+            </a:r>
+            <a:r>
+              <a:rPr lang="en-US" sz="1400" b="0" i="0" dirty="0">
+                <a:effectLst/>
+              </a:rPr>
+              <a:t>a summary of the financial balances </a:t>
+            </a:r>
+            <a:r>
+              <a:rPr lang="en-US" sz="1400" dirty="0"/>
+              <a:t>(bank accounts, revenue, expenses)</a:t>
+            </a:r>
+          </a:p>
+          <a:p>
+            <a:pPr marL="285750" indent="-285750">
+              <a:buFont typeface="Arial" panose="020B0604020202020204" pitchFamily="34" charset="0"/>
+              <a:buChar char="•"/>
+            </a:pPr>
+            <a:r>
+              <a:rPr lang="en-US" sz="1400" b="1" dirty="0">
+                <a:solidFill>
+                  <a:srgbClr val="FF0000"/>
+                </a:solidFill>
+              </a:rPr>
+              <a:t>accounts receivable</a:t>
+            </a:r>
+            <a:r>
+              <a:rPr lang="en-US" sz="1400" dirty="0"/>
+              <a:t> (AR or A/R) = payments to be received</a:t>
+            </a:r>
+          </a:p>
+          <a:p>
+            <a:pPr marL="285750" indent="-285750">
+              <a:buFont typeface="Arial" panose="020B0604020202020204" pitchFamily="34" charset="0"/>
+              <a:buChar char="•"/>
+            </a:pPr>
+            <a:r>
+              <a:rPr lang="en-US" sz="1400" b="1" dirty="0">
+                <a:solidFill>
+                  <a:srgbClr val="FF0000"/>
+                </a:solidFill>
+              </a:rPr>
+              <a:t>accounts payable</a:t>
+            </a:r>
+            <a:r>
+              <a:rPr lang="en-US" sz="1400" dirty="0"/>
+              <a:t> (AP) = </a:t>
+            </a:r>
+            <a:r>
+              <a:rPr lang="en-US" sz="1400" b="0" i="0" dirty="0">
+                <a:effectLst/>
+              </a:rPr>
+              <a:t>money to be paid out, a liability on balance sheet</a:t>
+            </a:r>
+            <a:endParaRPr lang="en-US" sz="1400" dirty="0"/>
+          </a:p>
+        </p:txBody>
+      </p:sp>
     </p:spTree>
     <p:extLst>
       <p:ext uri="{BB962C8B-B14F-4D97-AF65-F5344CB8AC3E}">
@@ -7952,6 +8038,183 @@
 </p:sld>
 </file>
 
+<file path=ppt/slides/slide4.xml><?xml version="1.0" encoding="utf-8"?>
+<p:sld xmlns:a="http://schemas.openxmlformats.org/drawingml/2006/main" xmlns:r="http://schemas.openxmlformats.org/officeDocument/2006/relationships" xmlns:p="http://schemas.openxmlformats.org/presentationml/2006/main">
+  <p:cSld>
+    <p:spTree>
+      <p:nvGrpSpPr>
+        <p:cNvPr id="1" name=""/>
+        <p:cNvGrpSpPr/>
+        <p:nvPr/>
+      </p:nvGrpSpPr>
+      <p:grpSpPr>
+        <a:xfrm>
+          <a:off x="0" y="0"/>
+          <a:ext cx="0" cy="0"/>
+          <a:chOff x="0" y="0"/>
+          <a:chExt cx="0" cy="0"/>
+        </a:xfrm>
+      </p:grpSpPr>
+      <p:sp>
+        <p:nvSpPr>
+          <p:cNvPr id="2" name="TextBox 1">
+            <a:extLst>
+              <a:ext uri="{FF2B5EF4-FFF2-40B4-BE49-F238E27FC236}">
+                <a16:creationId xmlns:a16="http://schemas.microsoft.com/office/drawing/2014/main" id="{9772A975-345E-4744-AC48-210D71FDE633}"/>
+              </a:ext>
+            </a:extLst>
+          </p:cNvPr>
+          <p:cNvSpPr txBox="1"/>
+          <p:nvPr/>
+        </p:nvSpPr>
+        <p:spPr>
+          <a:xfrm>
+            <a:off x="1" y="37047"/>
+            <a:ext cx="3670300" cy="523220"/>
+          </a:xfrm>
+          <a:prstGeom prst="rect">
+            <a:avLst/>
+          </a:prstGeom>
+          <a:noFill/>
+        </p:spPr>
+        <p:txBody>
+          <a:bodyPr wrap="square" rtlCol="0">
+            <a:spAutoFit/>
+          </a:bodyPr>
+          <a:lstStyle/>
+          <a:p>
+            <a:r>
+              <a:rPr lang="en-US" sz="2800" b="1" dirty="0"/>
+              <a:t>Non For Profits (NFP)</a:t>
+            </a:r>
+          </a:p>
+        </p:txBody>
+      </p:sp>
+      <p:sp>
+        <p:nvSpPr>
+          <p:cNvPr id="3" name="TextBox 2">
+            <a:extLst>
+              <a:ext uri="{FF2B5EF4-FFF2-40B4-BE49-F238E27FC236}">
+                <a16:creationId xmlns:a16="http://schemas.microsoft.com/office/drawing/2014/main" id="{B8737266-5DBF-AE95-D013-2F87F75F0953}"/>
+              </a:ext>
+            </a:extLst>
+          </p:cNvPr>
+          <p:cNvSpPr txBox="1"/>
+          <p:nvPr/>
+        </p:nvSpPr>
+        <p:spPr>
+          <a:xfrm>
+            <a:off x="347722" y="1120676"/>
+            <a:ext cx="5522135" cy="3108543"/>
+          </a:xfrm>
+          <a:prstGeom prst="rect">
+            <a:avLst/>
+          </a:prstGeom>
+          <a:noFill/>
+        </p:spPr>
+        <p:txBody>
+          <a:bodyPr wrap="square" rtlCol="0">
+            <a:spAutoFit/>
+          </a:bodyPr>
+          <a:lstStyle/>
+          <a:p>
+            <a:r>
+              <a:rPr lang="en-US" sz="1400" dirty="0"/>
+              <a:t>Natural accounts (banks accounts)</a:t>
+            </a:r>
+          </a:p>
+          <a:p>
+            <a:endParaRPr lang="en-US" sz="1400" dirty="0"/>
+          </a:p>
+          <a:p>
+            <a:r>
+              <a:rPr lang="en-US" sz="1400" dirty="0"/>
+              <a:t>Tag accounts (financial dimensions - related to product, geography, etc.)</a:t>
+            </a:r>
+          </a:p>
+          <a:p>
+            <a:r>
+              <a:rPr lang="en-US" sz="1400" dirty="0"/>
+              <a:t>NFP usually have up to five financial dimensions, for example:</a:t>
+            </a:r>
+          </a:p>
+          <a:p>
+            <a:r>
+              <a:rPr lang="en-US" sz="1400" dirty="0"/>
+              <a:t>   1. department, program</a:t>
+            </a:r>
+          </a:p>
+          <a:p>
+            <a:r>
+              <a:rPr lang="en-US" sz="1400" dirty="0"/>
+              <a:t>   2. restricted or not-restricted to program</a:t>
+            </a:r>
+          </a:p>
+          <a:p>
+            <a:r>
+              <a:rPr lang="en-US" sz="1400" dirty="0"/>
+              <a:t>   3. project, grant</a:t>
+            </a:r>
+          </a:p>
+          <a:p>
+            <a:r>
+              <a:rPr lang="en-US" sz="1400" dirty="0"/>
+              <a:t>   etc.</a:t>
+            </a:r>
+          </a:p>
+          <a:p>
+            <a:endParaRPr lang="en-US" sz="1400" dirty="0"/>
+          </a:p>
+          <a:p>
+            <a:r>
+              <a:rPr lang="en-US" sz="1400" dirty="0"/>
+              <a:t>===========================</a:t>
+            </a:r>
+          </a:p>
+          <a:p>
+            <a:r>
+              <a:rPr lang="en-US" sz="1400" dirty="0"/>
+              <a:t>Example: </a:t>
+            </a:r>
+            <a:r>
+              <a:rPr lang="en-US" sz="1400" dirty="0" err="1"/>
+              <a:t>Bill.com</a:t>
+            </a:r>
+            <a:endParaRPr lang="en-US" sz="1400" dirty="0"/>
+          </a:p>
+          <a:p>
+            <a:r>
+              <a:rPr lang="en-US" sz="1400" dirty="0"/>
+              <a:t>Allows CPA firms to login, see a list of their business clients, </a:t>
+            </a:r>
+          </a:p>
+          <a:p>
+            <a:r>
+              <a:rPr lang="en-US" sz="1400" dirty="0"/>
+              <a:t>and process payments for them.</a:t>
+            </a:r>
+          </a:p>
+          <a:p>
+            <a:r>
+              <a:rPr lang="en-US" sz="1400" dirty="0"/>
+              <a:t>Each subsidiary has a separate ledger</a:t>
+            </a:r>
+          </a:p>
+        </p:txBody>
+      </p:sp>
+    </p:spTree>
+    <p:extLst>
+      <p:ext uri="{BB962C8B-B14F-4D97-AF65-F5344CB8AC3E}">
+        <p14:creationId xmlns:p14="http://schemas.microsoft.com/office/powerpoint/2010/main" val="1633716664"/>
+      </p:ext>
+    </p:extLst>
+  </p:cSld>
+  <p:clrMapOvr>
+    <a:masterClrMapping/>
+  </p:clrMapOvr>
+</p:sld>
+</file>
+
 <file path=ppt/theme/theme1.xml><?xml version="1.0" encoding="utf-8"?>
 <a:theme xmlns:a="http://schemas.openxmlformats.org/drawingml/2006/main" name="Office Theme">
   <a:themeElements>
